--- a/MTech_Project_Soumyadeep_M25AI1015_Safe_Multi_Agent_Teaching_System.pptx
+++ b/MTech_Project_Soumyadeep_M25AI1015_Safe_Multi_Agent_Teaching_System.pptx
@@ -2224,7 +2224,7 @@
           <a:p>
             <a:fld id="{A21D87EE-CF16-1145-A23C-DA5ABEF76CB4}" type="datetimeFigureOut">
               <a:rPr lang="en-US" smtClean="0"/>
-              <a:t>4/8/26</a:t>
+              <a:t>4/11/26</a:t>
             </a:fld>
             <a:endParaRPr lang="en-US"/>
           </a:p>
@@ -4207,7 +4207,7 @@
           <a:p>
             <a:fld id="{5BCAD085-E8A6-8845-BD4E-CB4CCA059FC4}" type="datetimeFigureOut">
               <a:rPr lang="en-US" smtClean="0"/>
-              <a:t>4/6/26</a:t>
+              <a:t>4/11/26</a:t>
             </a:fld>
             <a:endParaRPr lang="en-US"/>
           </a:p>
@@ -4375,7 +4375,7 @@
           <a:p>
             <a:fld id="{5BCAD085-E8A6-8845-BD4E-CB4CCA059FC4}" type="datetimeFigureOut">
               <a:rPr lang="en-US" smtClean="0"/>
-              <a:t>4/6/26</a:t>
+              <a:t>4/11/26</a:t>
             </a:fld>
             <a:endParaRPr lang="en-US"/>
           </a:p>
@@ -4553,7 +4553,7 @@
           <a:p>
             <a:fld id="{5BCAD085-E8A6-8845-BD4E-CB4CCA059FC4}" type="datetimeFigureOut">
               <a:rPr lang="en-US" smtClean="0"/>
-              <a:t>4/6/26</a:t>
+              <a:t>4/11/26</a:t>
             </a:fld>
             <a:endParaRPr lang="en-US"/>
           </a:p>
@@ -4758,7 +4758,7 @@
           </a:prstGeom>
           <a:extLst>
             <a:ext uri="{C572A759-6A51-4108-AA02-DFA0A04FC94B}">
-              <ma14:wrappingTextBoxFlag xmlns:ma14="http://schemas.microsoft.com/office/mac/drawingml/2011/main" xmlns="" val="0"/>
+              <ma14:wrappingTextBoxFlag xmlns="" xmlns:ma14="http://schemas.microsoft.com/office/mac/drawingml/2011/main" val="0"/>
             </a:ext>
           </a:extLst>
         </p:spPr>
@@ -4906,7 +4906,7 @@
           <a:p>
             <a:fld id="{5BCAD085-E8A6-8845-BD4E-CB4CCA059FC4}" type="datetimeFigureOut">
               <a:rPr lang="en-US" smtClean="0"/>
-              <a:t>4/6/26</a:t>
+              <a:t>4/11/26</a:t>
             </a:fld>
             <a:endParaRPr lang="en-US"/>
           </a:p>
@@ -5151,7 +5151,7 @@
           <a:p>
             <a:fld id="{5BCAD085-E8A6-8845-BD4E-CB4CCA059FC4}" type="datetimeFigureOut">
               <a:rPr lang="en-US" smtClean="0"/>
-              <a:t>4/6/26</a:t>
+              <a:t>4/11/26</a:t>
             </a:fld>
             <a:endParaRPr lang="en-US"/>
           </a:p>
@@ -5436,7 +5436,7 @@
           <a:p>
             <a:fld id="{5BCAD085-E8A6-8845-BD4E-CB4CCA059FC4}" type="datetimeFigureOut">
               <a:rPr lang="en-US" smtClean="0"/>
-              <a:t>4/6/26</a:t>
+              <a:t>4/11/26</a:t>
             </a:fld>
             <a:endParaRPr lang="en-US"/>
           </a:p>
@@ -5855,7 +5855,7 @@
           <a:p>
             <a:fld id="{5BCAD085-E8A6-8845-BD4E-CB4CCA059FC4}" type="datetimeFigureOut">
               <a:rPr lang="en-US" smtClean="0"/>
-              <a:t>4/6/26</a:t>
+              <a:t>4/11/26</a:t>
             </a:fld>
             <a:endParaRPr lang="en-US"/>
           </a:p>
@@ -5972,7 +5972,7 @@
           <a:p>
             <a:fld id="{5BCAD085-E8A6-8845-BD4E-CB4CCA059FC4}" type="datetimeFigureOut">
               <a:rPr lang="en-US" smtClean="0"/>
-              <a:t>4/6/26</a:t>
+              <a:t>4/11/26</a:t>
             </a:fld>
             <a:endParaRPr lang="en-US"/>
           </a:p>
@@ -6067,7 +6067,7 @@
           <a:p>
             <a:fld id="{5BCAD085-E8A6-8845-BD4E-CB4CCA059FC4}" type="datetimeFigureOut">
               <a:rPr lang="en-US" smtClean="0"/>
-              <a:t>4/6/26</a:t>
+              <a:t>4/11/26</a:t>
             </a:fld>
             <a:endParaRPr lang="en-US"/>
           </a:p>
@@ -6342,7 +6342,7 @@
           <a:p>
             <a:fld id="{5BCAD085-E8A6-8845-BD4E-CB4CCA059FC4}" type="datetimeFigureOut">
               <a:rPr lang="en-US" smtClean="0"/>
-              <a:t>4/6/26</a:t>
+              <a:t>4/11/26</a:t>
             </a:fld>
             <a:endParaRPr lang="en-US"/>
           </a:p>
@@ -6594,7 +6594,7 @@
           <a:p>
             <a:fld id="{5BCAD085-E8A6-8845-BD4E-CB4CCA059FC4}" type="datetimeFigureOut">
               <a:rPr lang="en-US" smtClean="0"/>
-              <a:t>4/6/26</a:t>
+              <a:t>4/11/26</a:t>
             </a:fld>
             <a:endParaRPr lang="en-US"/>
           </a:p>
@@ -6805,7 +6805,7 @@
           <a:p>
             <a:fld id="{5BCAD085-E8A6-8845-BD4E-CB4CCA059FC4}" type="datetimeFigureOut">
               <a:rPr lang="en-US" smtClean="0"/>
-              <a:t>4/6/26</a:t>
+              <a:t>4/11/26</a:t>
             </a:fld>
             <a:endParaRPr lang="en-US"/>
           </a:p>
@@ -7248,7 +7248,7 @@
           </a:prstGeom>
           <a:extLst>
             <a:ext uri="{C572A759-6A51-4108-AA02-DFA0A04FC94B}">
-              <ma14:wrappingTextBoxFlag xmlns:ma14="http://schemas.microsoft.com/office/mac/drawingml/2011/main" xmlns="" val="0"/>
+              <ma14:wrappingTextBoxFlag xmlns="" xmlns:ma14="http://schemas.microsoft.com/office/mac/drawingml/2011/main" val="0"/>
             </a:ext>
           </a:extLst>
         </p:spPr>
@@ -9102,7 +9102,7 @@
           </a:prstGeom>
           <a:extLst>
             <a:ext uri="{C572A759-6A51-4108-AA02-DFA0A04FC94B}">
-              <ma14:wrappingTextBoxFlag xmlns:ma14="http://schemas.microsoft.com/office/mac/drawingml/2011/main" xmlns="" val="0"/>
+              <ma14:wrappingTextBoxFlag xmlns="" xmlns:ma14="http://schemas.microsoft.com/office/mac/drawingml/2011/main" val="0"/>
             </a:ext>
           </a:extLst>
         </p:spPr>
@@ -10070,7 +10070,7 @@
           </a:prstGeom>
           <a:extLst>
             <a:ext uri="{C572A759-6A51-4108-AA02-DFA0A04FC94B}">
-              <ma14:wrappingTextBoxFlag xmlns:ma14="http://schemas.microsoft.com/office/mac/drawingml/2011/main" xmlns="" val="0"/>
+              <ma14:wrappingTextBoxFlag xmlns="" xmlns:ma14="http://schemas.microsoft.com/office/mac/drawingml/2011/main" val="0"/>
             </a:ext>
           </a:extLst>
         </p:spPr>
@@ -11152,7 +11152,7 @@
           </a:prstGeom>
           <a:extLst>
             <a:ext uri="{C572A759-6A51-4108-AA02-DFA0A04FC94B}">
-              <ma14:wrappingTextBoxFlag xmlns:ma14="http://schemas.microsoft.com/office/mac/drawingml/2011/main" xmlns="" val="0"/>
+              <ma14:wrappingTextBoxFlag xmlns="" xmlns:ma14="http://schemas.microsoft.com/office/mac/drawingml/2011/main" val="0"/>
             </a:ext>
           </a:extLst>
         </p:spPr>
@@ -12493,7 +12493,7 @@
           </a:prstGeom>
           <a:extLst>
             <a:ext uri="{C572A759-6A51-4108-AA02-DFA0A04FC94B}">
-              <ma14:wrappingTextBoxFlag xmlns:ma14="http://schemas.microsoft.com/office/mac/drawingml/2011/main" xmlns="" val="0"/>
+              <ma14:wrappingTextBoxFlag xmlns="" xmlns:ma14="http://schemas.microsoft.com/office/mac/drawingml/2011/main" val="0"/>
             </a:ext>
           </a:extLst>
         </p:spPr>
@@ -13595,7 +13595,7 @@
           </a:prstGeom>
           <a:extLst>
             <a:ext uri="{C572A759-6A51-4108-AA02-DFA0A04FC94B}">
-              <ma14:wrappingTextBoxFlag xmlns:ma14="http://schemas.microsoft.com/office/mac/drawingml/2011/main" xmlns="" val="0"/>
+              <ma14:wrappingTextBoxFlag xmlns="" xmlns:ma14="http://schemas.microsoft.com/office/mac/drawingml/2011/main" val="0"/>
             </a:ext>
           </a:extLst>
         </p:spPr>
@@ -14213,7 +14213,7 @@
           </a:prstGeom>
           <a:extLst>
             <a:ext uri="{C572A759-6A51-4108-AA02-DFA0A04FC94B}">
-              <ma14:wrappingTextBoxFlag xmlns:ma14="http://schemas.microsoft.com/office/mac/drawingml/2011/main" xmlns="" val="0"/>
+              <ma14:wrappingTextBoxFlag xmlns="" xmlns:ma14="http://schemas.microsoft.com/office/mac/drawingml/2011/main" val="0"/>
             </a:ext>
           </a:extLst>
         </p:spPr>
@@ -15027,7 +15027,7 @@
           </a:prstGeom>
           <a:extLst>
             <a:ext uri="{C572A759-6A51-4108-AA02-DFA0A04FC94B}">
-              <ma14:wrappingTextBoxFlag xmlns:ma14="http://schemas.microsoft.com/office/mac/drawingml/2011/main" xmlns="" val="0"/>
+              <ma14:wrappingTextBoxFlag xmlns="" xmlns:ma14="http://schemas.microsoft.com/office/mac/drawingml/2011/main" val="0"/>
             </a:ext>
           </a:extLst>
         </p:spPr>
@@ -15192,7 +15192,7 @@
         </p:nvSpPr>
         <p:spPr>
           <a:xfrm>
-            <a:off x="484634" y="1408176"/>
+            <a:off x="323273" y="1393767"/>
             <a:ext cx="1828800" cy="914400"/>
           </a:xfrm>
           <a:prstGeom prst="roundRect">
@@ -15253,7 +15253,7 @@
         </p:nvSpPr>
         <p:spPr>
           <a:xfrm>
-            <a:off x="557786" y="1463040"/>
+            <a:off x="396425" y="1448631"/>
             <a:ext cx="1682496" cy="804672"/>
           </a:xfrm>
           <a:prstGeom prst="rect">
@@ -15280,7 +15280,7 @@
                 <a:ea typeface="Calibri" pitchFamily="34" charset="-122"/>
                 <a:cs typeface="Calibri" pitchFamily="34" charset="-120"/>
               </a:rPr>
-              <a:t>Effectiveness</a:t>
+              <a:t>Effectiveness: </a:t>
             </a:r>
             <a:endParaRPr lang="en-US" sz="1550" dirty="0"/>
           </a:p>
@@ -15311,7 +15311,7 @@
         </p:nvSpPr>
         <p:spPr>
           <a:xfrm>
-            <a:off x="2587754" y="1408176"/>
+            <a:off x="2433804" y="1408176"/>
             <a:ext cx="1828800" cy="914400"/>
           </a:xfrm>
           <a:prstGeom prst="roundRect">
@@ -15372,7 +15372,7 @@
         </p:nvSpPr>
         <p:spPr>
           <a:xfrm>
-            <a:off x="2660906" y="1463040"/>
+            <a:off x="2506956" y="1463040"/>
             <a:ext cx="1682496" cy="804672"/>
           </a:xfrm>
           <a:prstGeom prst="rect">
@@ -15399,7 +15399,7 @@
                 <a:ea typeface="Calibri" pitchFamily="34" charset="-122"/>
                 <a:cs typeface="Calibri" pitchFamily="34" charset="-120"/>
               </a:rPr>
-              <a:t>Efficiency</a:t>
+              <a:t>Efficiency: </a:t>
             </a:r>
             <a:endParaRPr lang="en-US" sz="1550" dirty="0"/>
           </a:p>
@@ -15430,7 +15430,7 @@
         </p:nvSpPr>
         <p:spPr>
           <a:xfrm>
-            <a:off x="502921" y="2971800"/>
+            <a:off x="320041" y="2939103"/>
             <a:ext cx="1828800" cy="914400"/>
           </a:xfrm>
           <a:prstGeom prst="roundRect">
@@ -15491,7 +15491,7 @@
         </p:nvSpPr>
         <p:spPr>
           <a:xfrm>
-            <a:off x="576073" y="3026664"/>
+            <a:off x="393193" y="2993967"/>
             <a:ext cx="1682496" cy="804672"/>
           </a:xfrm>
           <a:prstGeom prst="rect">
@@ -15518,7 +15518,7 @@
                 <a:ea typeface="Calibri" pitchFamily="34" charset="-122"/>
                 <a:cs typeface="Calibri" pitchFamily="34" charset="-120"/>
               </a:rPr>
-              <a:t>Robustness</a:t>
+              <a:t>Robustness: </a:t>
             </a:r>
             <a:endParaRPr lang="en-US" sz="1550" dirty="0"/>
           </a:p>
@@ -15549,7 +15549,7 @@
         </p:nvSpPr>
         <p:spPr>
           <a:xfrm>
-            <a:off x="2606041" y="2971800"/>
+            <a:off x="2423161" y="2939103"/>
             <a:ext cx="1828800" cy="914400"/>
           </a:xfrm>
           <a:prstGeom prst="roundRect">
@@ -15610,7 +15610,7 @@
         </p:nvSpPr>
         <p:spPr>
           <a:xfrm>
-            <a:off x="2679193" y="3026664"/>
+            <a:off x="2496313" y="2993967"/>
             <a:ext cx="1682496" cy="804672"/>
           </a:xfrm>
           <a:prstGeom prst="rect">
@@ -15637,7 +15637,7 @@
                 <a:ea typeface="Calibri" pitchFamily="34" charset="-122"/>
                 <a:cs typeface="Calibri" pitchFamily="34" charset="-120"/>
               </a:rPr>
-              <a:t>Safety &amp; alignment</a:t>
+              <a:t>Safety &amp; alignment: </a:t>
             </a:r>
             <a:endParaRPr lang="en-US" sz="1550" dirty="0"/>
           </a:p>
@@ -15799,7 +15799,7 @@
           </a:prstGeom>
           <a:extLst>
             <a:ext uri="{C572A759-6A51-4108-AA02-DFA0A04FC94B}">
-              <ma14:wrappingTextBoxFlag xmlns:ma14="http://schemas.microsoft.com/office/mac/drawingml/2011/main" xmlns="" val="0"/>
+              <ma14:wrappingTextBoxFlag xmlns="" xmlns:ma14="http://schemas.microsoft.com/office/mac/drawingml/2011/main" val="0"/>
             </a:ext>
           </a:extLst>
         </p:spPr>
@@ -15829,10 +15829,10 @@
       </p:sp>
       <p:pic>
         <p:nvPicPr>
-          <p:cNvPr id="21" name="Picture 20" descr="A screenshot of a computer program&#10;&#10;AI-generated content may be incorrect.">
+          <p:cNvPr id="11" name="Picture 10">
             <a:extLst>
               <a:ext uri="{FF2B5EF4-FFF2-40B4-BE49-F238E27FC236}">
-                <a16:creationId xmlns:a16="http://schemas.microsoft.com/office/drawing/2014/main" id="{806F4411-1B80-1BB9-6DEF-BCAF46EFD315}"/>
+                <a16:creationId xmlns:a16="http://schemas.microsoft.com/office/drawing/2014/main" id="{56CA35A3-BB65-E80D-6ADF-446F5EDABD07}"/>
               </a:ext>
             </a:extLst>
           </p:cNvPr>
@@ -15849,8 +15849,8 @@
         </p:blipFill>
         <p:spPr>
           <a:xfrm>
-            <a:off x="4628199" y="1395793"/>
-            <a:ext cx="4195762" cy="4502087"/>
+            <a:off x="4510990" y="933658"/>
+            <a:ext cx="4309737" cy="5292436"/>
           </a:xfrm>
           <a:prstGeom prst="rect">
             <a:avLst/>
@@ -17959,7 +17959,7 @@
           </a:prstGeom>
           <a:extLst>
             <a:ext uri="{C572A759-6A51-4108-AA02-DFA0A04FC94B}">
-              <ma14:wrappingTextBoxFlag xmlns:ma14="http://schemas.microsoft.com/office/mac/drawingml/2011/main" xmlns="" val="0"/>
+              <ma14:wrappingTextBoxFlag xmlns="" xmlns:ma14="http://schemas.microsoft.com/office/mac/drawingml/2011/main" val="0"/>
             </a:ext>
           </a:extLst>
         </p:spPr>
@@ -18685,7 +18685,7 @@
           </a:prstGeom>
           <a:extLst>
             <a:ext uri="{C572A759-6A51-4108-AA02-DFA0A04FC94B}">
-              <ma14:wrappingTextBoxFlag xmlns:ma14="http://schemas.microsoft.com/office/mac/drawingml/2011/main" xmlns="" val="0"/>
+              <ma14:wrappingTextBoxFlag xmlns="" xmlns:ma14="http://schemas.microsoft.com/office/mac/drawingml/2011/main" val="0"/>
             </a:ext>
           </a:extLst>
         </p:spPr>
@@ -19476,7 +19476,7 @@
           </a:prstGeom>
           <a:extLst>
             <a:ext uri="{C572A759-6A51-4108-AA02-DFA0A04FC94B}">
-              <ma14:wrappingTextBoxFlag xmlns:ma14="http://schemas.microsoft.com/office/mac/drawingml/2011/main" xmlns="" val="0"/>
+              <ma14:wrappingTextBoxFlag xmlns="" xmlns:ma14="http://schemas.microsoft.com/office/mac/drawingml/2011/main" val="0"/>
             </a:ext>
           </a:extLst>
         </p:spPr>
@@ -20420,7 +20420,7 @@
           </a:prstGeom>
           <a:extLst>
             <a:ext uri="{C572A759-6A51-4108-AA02-DFA0A04FC94B}">
-              <ma14:wrappingTextBoxFlag xmlns:ma14="http://schemas.microsoft.com/office/mac/drawingml/2011/main" xmlns="" val="0"/>
+              <ma14:wrappingTextBoxFlag xmlns="" xmlns:ma14="http://schemas.microsoft.com/office/mac/drawingml/2011/main" val="0"/>
             </a:ext>
           </a:extLst>
         </p:spPr>
@@ -20878,7 +20878,7 @@
         </p:nvSpPr>
         <p:spPr>
           <a:xfrm>
-            <a:off x="1810512" y="2907792"/>
+            <a:off x="1792224" y="2907792"/>
             <a:ext cx="1152144" cy="502920"/>
           </a:xfrm>
           <a:prstGeom prst="rect">
@@ -21060,7 +21060,7 @@
         </p:nvSpPr>
         <p:spPr>
           <a:xfrm>
-            <a:off x="3108960" y="2907792"/>
+            <a:off x="3369564" y="2896893"/>
             <a:ext cx="1152144" cy="502920"/>
           </a:xfrm>
           <a:prstGeom prst="rect">
@@ -21242,7 +21242,7 @@
         </p:nvSpPr>
         <p:spPr>
           <a:xfrm>
-            <a:off x="4407408" y="2907792"/>
+            <a:off x="4916980" y="2915181"/>
             <a:ext cx="1152144" cy="502920"/>
           </a:xfrm>
           <a:prstGeom prst="rect">
@@ -21385,7 +21385,7 @@
         </p:nvSpPr>
         <p:spPr>
           <a:xfrm>
-            <a:off x="5705856" y="2907792"/>
+            <a:off x="6254496" y="2896893"/>
             <a:ext cx="1152144" cy="502920"/>
           </a:xfrm>
           <a:prstGeom prst="rect">
@@ -21863,7 +21863,7 @@
           </a:prstGeom>
           <a:extLst>
             <a:ext uri="{C572A759-6A51-4108-AA02-DFA0A04FC94B}">
-              <ma14:wrappingTextBoxFlag xmlns:ma14="http://schemas.microsoft.com/office/mac/drawingml/2011/main" xmlns="" val="0"/>
+              <ma14:wrappingTextBoxFlag xmlns="" xmlns:ma14="http://schemas.microsoft.com/office/mac/drawingml/2011/main" val="0"/>
             </a:ext>
           </a:extLst>
         </p:spPr>
@@ -22316,7 +22316,7 @@
           </a:prstGeom>
           <a:extLst>
             <a:ext uri="{C572A759-6A51-4108-AA02-DFA0A04FC94B}">
-              <ma14:wrappingTextBoxFlag xmlns:ma14="http://schemas.microsoft.com/office/mac/drawingml/2011/main" xmlns="" val="0"/>
+              <ma14:wrappingTextBoxFlag xmlns="" xmlns:ma14="http://schemas.microsoft.com/office/mac/drawingml/2011/main" val="0"/>
             </a:ext>
           </a:extLst>
         </p:spPr>
@@ -22493,7 +22493,7 @@
           </a:prstGeom>
           <a:extLst>
             <a:ext uri="{C572A759-6A51-4108-AA02-DFA0A04FC94B}">
-              <ma14:wrappingTextBoxFlag xmlns:ma14="http://schemas.microsoft.com/office/mac/drawingml/2011/main" xmlns="" val="0"/>
+              <ma14:wrappingTextBoxFlag xmlns="" xmlns:ma14="http://schemas.microsoft.com/office/mac/drawingml/2011/main" val="0"/>
             </a:ext>
           </a:extLst>
         </p:spPr>
@@ -23678,7 +23678,7 @@
           </a:prstGeom>
           <a:extLst>
             <a:ext uri="{C572A759-6A51-4108-AA02-DFA0A04FC94B}">
-              <ma14:wrappingTextBoxFlag xmlns:ma14="http://schemas.microsoft.com/office/mac/drawingml/2011/main" xmlns="" val="0"/>
+              <ma14:wrappingTextBoxFlag xmlns="" xmlns:ma14="http://schemas.microsoft.com/office/mac/drawingml/2011/main" val="0"/>
             </a:ext>
           </a:extLst>
         </p:spPr>
@@ -24638,7 +24638,7 @@
           </a:prstGeom>
           <a:extLst>
             <a:ext uri="{C572A759-6A51-4108-AA02-DFA0A04FC94B}">
-              <ma14:wrappingTextBoxFlag xmlns:ma14="http://schemas.microsoft.com/office/mac/drawingml/2011/main" xmlns="" val="0"/>
+              <ma14:wrappingTextBoxFlag xmlns="" xmlns:ma14="http://schemas.microsoft.com/office/mac/drawingml/2011/main" val="0"/>
             </a:ext>
           </a:extLst>
         </p:spPr>
